--- a/docs/system-overview.pptx
+++ b/docs/system-overview.pptx
@@ -3142,7 +3142,7 @@
                 </a:solidFill>
                 <a:latin typeface="PingFang SC"/>
               </a:rPr>
-              <a:t>WorkLoom 获客系统</a:t>
+              <a:t>Growthmatrix·骇客帝国</a:t>
             </a:r>
           </a:p>
           <a:p>
@@ -4255,7 +4255,7 @@
                 </a:solidFill>
                 <a:latin typeface="PingFang SC"/>
               </a:rPr>
-              <a:t>WorkLoom 获客系统是什么</a:t>
+              <a:t>Growthmatrix·骇客帝国是什么</a:t>
             </a:r>
           </a:p>
         </p:txBody>

--- a/docs/system-overview.pptx
+++ b/docs/system-overview.pptx
@@ -3142,7 +3142,7 @@
                 </a:solidFill>
                 <a:latin typeface="PingFang SC"/>
               </a:rPr>
-              <a:t>Growthmatrix·骇客帝国</a:t>
+              <a:t>WorkLoom 获客系统</a:t>
             </a:r>
           </a:p>
           <a:p>
@@ -4255,7 +4255,7 @@
                 </a:solidFill>
                 <a:latin typeface="PingFang SC"/>
               </a:rPr>
-              <a:t>Growthmatrix·骇客帝国是什么</a:t>
+              <a:t>WorkLoom 获客系统是什么</a:t>
             </a:r>
           </a:p>
         </p:txBody>
